--- a/entregables/presentaciones/IQS_B8_Robot_Learning.pptx
+++ b/entregables/presentaciones/IQS_B8_Robot_Learning.pptx
@@ -606,7 +606,7 @@
           <a:lstStyle/>
           <a:p>
             <a:r>
-              <a:t>Explicar el clonado de comportamiento como aprendizaje supervisado sobre demostraciones teleoperadas y su fallo característico: al desviarse entra en estados no vistos y el error se acumula. Usar el ejemplo del obstáculo para la multimodalidad: dos rodeos correctos y la red que predice el promedio va por el centro y choca; las diffusion policies generan la distribución completa. Cerrar con la división del trabajo actual: refuerzo donde la recompensa es fácil de escribir (locomoción), imitación donde la tarea es fácil de demostrar (manipulación).</a:t>
+              <a:t>Explicar la clonación de comportamiento como aprendizaje supervisado sobre demostraciones teleoperadas y su fallo característico: al desviarse entra en estados no vistos y el error se acumula. Usar el ejemplo del obstáculo para la multimodalidad: dos rodeos correctos y la red que predice el promedio va por el centro y choca; las diffusion policies generan la distribución completa. Cerrar con la división del trabajo actual: refuerzo donde la recompensa es fácil de escribir (locomoción), imitación donde la tarea es fácil de demostrar (manipulación).</a:t>
             </a:r>
           </a:p>
         </p:txBody>

--- a/entregables/presentaciones/IQS_B8_Robot_Learning.pptx
+++ b/entregables/presentaciones/IQS_B8_Robot_Learning.pptx
@@ -4461,7 +4461,7 @@
                 <a:ea typeface="Calibri" pitchFamily="34" charset="-122"/>
                 <a:cs typeface="Calibri" pitchFamily="34" charset="-120"/>
               </a:rPr>
-              <a:t>Es la evolución de diseño de De Silva llevada a su consecuencia: un modelo del sistema real que se monitoriza, se optimiza y devuelve mejoras al sistema (De Silva et al., 2016, p. 7).</a:t>
+              <a:t>Es la evolución de diseño de De Silva llevada a su consecuencia: un modelo del sistema real que se monitoriza, se optimiza y devuelve mejoras al sistema (De Silva et al., 2016, p. 8).</a:t>
             </a:r>
             <a:endParaRPr lang="en-US" sz="1250" dirty="0"/>
           </a:p>
@@ -4627,7 +4627,7 @@
                 <a:ea typeface="Calibri" pitchFamily="34" charset="-122"/>
                 <a:cs typeface="Calibri" pitchFamily="34" charset="-120"/>
               </a:rPr>
-              <a:t>De Silva et al., 2016, p. 7 · Síntesis del curso</a:t>
+              <a:t>De Silva et al., 2016, p. 8 · Síntesis del curso</a:t>
             </a:r>
             <a:endParaRPr lang="en-US" sz="1000" dirty="0"/>
           </a:p>

--- a/entregables/presentaciones/IQS_B8_Robot_Learning.pptx
+++ b/entregables/presentaciones/IQS_B8_Robot_Learning.pptx
@@ -950,7 +950,7 @@
           <a:lstStyle/>
           <a:p>
             <a:r>
-              <a:t>Proyectar al cerrar S39 y dejar publicada en el campus. Recorrer las cuatro partes: test de B5 a B7; diseño de un PD con sobreoscilación, error de gravedad y windup; un paso completo de filtro de Kalman 1D (el mismo del taller de S28); y A* sobre rejilla más un diagnóstico de QoS. Recordar el criterio de corrección: planteamiento al 40 por ciento, sin desarrollo no hay puntos, los errores de arrastre no se penalizan dos veces. Recomendar preparar la hoja de formulario como método de repaso.</a:t>
+              <a:t>Proyectar al cerrar S39 y dejar publicada en el campus. Recorrer las cuatro partes: test de B5 a B7; diseño de un PD con sobreoscilación y error de gravedad, y el paso al PID con su windup; un paso completo de filtro de Kalman 1D (el mismo del taller de S28); y A* sobre rejilla más un diagnóstico de QoS. Recordar el criterio de corrección: planteamiento al 40 por ciento, sin desarrollo no hay puntos, los errores de arrastre no se penalizan dos veces. Recomendar preparar la hoja de formulario como método de repaso.</a:t>
             </a:r>
           </a:p>
         </p:txBody>
@@ -10118,7 +10118,7 @@
                 <a:ea typeface="Calibri" pitchFamily="34" charset="-122"/>
                 <a:cs typeface="Calibri" pitchFamily="34" charset="-120"/>
               </a:rPr>
-              <a:t>No se pregunta de forma literal: manipular la ecuación del MDQ, derivar las ecuaciones del EKF ni reproducir la arquitectura interna de un VLA. Examen de muestra con solución comentada, publicado hoy en el campus.</a:t>
+              <a:t>No se pregunta de forma literal: manipular la ecuación del MDP, derivar las ecuaciones del EKF ni reproducir la arquitectura interna de un VLA. Examen de muestra con solución comentada, publicado hoy en el campus.</a:t>
             </a:r>
             <a:endParaRPr lang="en-US" sz="1150" dirty="0"/>
           </a:p>

--- a/entregables/presentaciones/IQS_B8_Robot_Learning.pptx
+++ b/entregables/presentaciones/IQS_B8_Robot_Learning.pptx
@@ -10513,6 +10513,43 @@
           </a:p>
         </p:txBody>
       </p:sp>
+      <p:sp>
+        <p:nvSpPr>
+          <p:cNvPr id="12" name="TextBox 11">
+            <a:hlinkClick r:id="rId4"/>
+          </p:cNvPr>
+          <p:cNvSpPr txBox="1"/>
+          <p:nvPr/>
+        </p:nvSpPr>
+        <p:spPr>
+          <a:xfrm>
+            <a:off x="2057400" y="3310128"/>
+            <a:ext cx="5486400" cy="347472"/>
+          </a:xfrm>
+          <a:prstGeom prst="rect">
+            <a:avLst/>
+          </a:prstGeom>
+          <a:noFill/>
+        </p:spPr>
+        <p:txBody>
+          <a:bodyPr wrap="square" lIns="0" tIns="0" bIns="0" rIns="0">
+            <a:noAutofit/>
+          </a:bodyPr>
+          <a:lstStyle/>
+          <a:p>
+            <a:pPr algn="l"/>
+            <a:r>
+              <a:rPr sz="1400" b="1">
+                <a:solidFill>
+                  <a:srgbClr val="2FD26E"/>
+                </a:solidFill>
+                <a:latin typeface="Calibri"/>
+              </a:rPr>
+              <a:t>▸  Abrir en Colab · cuaderno S38</a:t>
+            </a:r>
+          </a:p>
+        </p:txBody>
+      </p:sp>
     </p:spTree>
   </p:cSld>
   <p:clrMapOvr>
@@ -12853,6 +12890,80 @@
               <a:t>PPO y sim-to-real · behavior cloning y diffusion policies · modelos fundacionales</a:t>
             </a:r>
             <a:endParaRPr lang="en-US" sz="1600" dirty="0"/>
+          </a:p>
+        </p:txBody>
+      </p:sp>
+      <p:sp>
+        <p:nvSpPr>
+          <p:cNvPr id="8" name="TextBox 7">
+            <a:hlinkClick r:id="rId3"/>
+          </p:cNvPr>
+          <p:cNvSpPr txBox="1"/>
+          <p:nvPr/>
+        </p:nvSpPr>
+        <p:spPr>
+          <a:xfrm>
+            <a:off x="2057400" y="3310128"/>
+            <a:ext cx="5486400" cy="347472"/>
+          </a:xfrm>
+          <a:prstGeom prst="rect">
+            <a:avLst/>
+          </a:prstGeom>
+          <a:noFill/>
+        </p:spPr>
+        <p:txBody>
+          <a:bodyPr wrap="square" lIns="0" tIns="0" bIns="0" rIns="0">
+            <a:noAutofit/>
+          </a:bodyPr>
+          <a:lstStyle/>
+          <a:p>
+            <a:pPr algn="l"/>
+            <a:r>
+              <a:rPr sz="1400" b="1">
+                <a:solidFill>
+                  <a:srgbClr val="2FD26E"/>
+                </a:solidFill>
+                <a:latin typeface="Calibri"/>
+              </a:rPr>
+              <a:t>▸  Abrir en Colab · cuaderno S39 RL profundo</a:t>
+            </a:r>
+          </a:p>
+        </p:txBody>
+      </p:sp>
+      <p:sp>
+        <p:nvSpPr>
+          <p:cNvPr id="9" name="TextBox 8">
+            <a:hlinkClick r:id="rId4"/>
+          </p:cNvPr>
+          <p:cNvSpPr txBox="1"/>
+          <p:nvPr/>
+        </p:nvSpPr>
+        <p:spPr>
+          <a:xfrm>
+            <a:off x="2057400" y="3675888"/>
+            <a:ext cx="5486400" cy="347472"/>
+          </a:xfrm>
+          <a:prstGeom prst="rect">
+            <a:avLst/>
+          </a:prstGeom>
+          <a:noFill/>
+        </p:spPr>
+        <p:txBody>
+          <a:bodyPr wrap="square" lIns="0" tIns="0" bIns="0" rIns="0">
+            <a:noAutofit/>
+          </a:bodyPr>
+          <a:lstStyle/>
+          <a:p>
+            <a:pPr algn="l"/>
+            <a:r>
+              <a:rPr sz="1400" b="1">
+                <a:solidFill>
+                  <a:srgbClr val="2FD26E"/>
+                </a:solidFill>
+                <a:latin typeface="Calibri"/>
+              </a:rPr>
+              <a:t>▸  Abrir en Colab · cuaderno S40 imitación y VLA</a:t>
+            </a:r>
           </a:p>
         </p:txBody>
       </p:sp>
